--- a/第7回/applicability-domain_2026_07_07.pptx
+++ b/第7回/applicability-domain_2026_07_07.pptx
@@ -329,7 +329,7 @@
           <a:p>
             <a:fld id="{5BCAD085-E8A6-8845-BD4E-CB4CCA059FC4}" type="datetimeFigureOut">
               <a:rPr lang="en-US" smtClean="0"/>
-              <a:t>7/5/26</a:t>
+              <a:t>7/6/26</a:t>
             </a:fld>
             <a:endParaRPr lang="en-US"/>
           </a:p>
@@ -497,7 +497,7 @@
           <a:p>
             <a:fld id="{5BCAD085-E8A6-8845-BD4E-CB4CCA059FC4}" type="datetimeFigureOut">
               <a:rPr lang="en-US" smtClean="0"/>
-              <a:t>7/5/26</a:t>
+              <a:t>7/6/26</a:t>
             </a:fld>
             <a:endParaRPr lang="en-US"/>
           </a:p>
@@ -675,7 +675,7 @@
           <a:p>
             <a:fld id="{5BCAD085-E8A6-8845-BD4E-CB4CCA059FC4}" type="datetimeFigureOut">
               <a:rPr lang="en-US" smtClean="0"/>
-              <a:t>7/5/26</a:t>
+              <a:t>7/6/26</a:t>
             </a:fld>
             <a:endParaRPr lang="en-US"/>
           </a:p>
@@ -843,7 +843,7 @@
           <a:p>
             <a:fld id="{5BCAD085-E8A6-8845-BD4E-CB4CCA059FC4}" type="datetimeFigureOut">
               <a:rPr lang="en-US" smtClean="0"/>
-              <a:t>7/5/26</a:t>
+              <a:t>7/6/26</a:t>
             </a:fld>
             <a:endParaRPr lang="en-US"/>
           </a:p>
@@ -1088,7 +1088,7 @@
           <a:p>
             <a:fld id="{5BCAD085-E8A6-8845-BD4E-CB4CCA059FC4}" type="datetimeFigureOut">
               <a:rPr lang="en-US" smtClean="0"/>
-              <a:t>7/5/26</a:t>
+              <a:t>7/6/26</a:t>
             </a:fld>
             <a:endParaRPr lang="en-US"/>
           </a:p>
@@ -1373,7 +1373,7 @@
           <a:p>
             <a:fld id="{5BCAD085-E8A6-8845-BD4E-CB4CCA059FC4}" type="datetimeFigureOut">
               <a:rPr lang="en-US" smtClean="0"/>
-              <a:t>7/5/26</a:t>
+              <a:t>7/6/26</a:t>
             </a:fld>
             <a:endParaRPr lang="en-US"/>
           </a:p>
@@ -1792,7 +1792,7 @@
           <a:p>
             <a:fld id="{5BCAD085-E8A6-8845-BD4E-CB4CCA059FC4}" type="datetimeFigureOut">
               <a:rPr lang="en-US" smtClean="0"/>
-              <a:t>7/5/26</a:t>
+              <a:t>7/6/26</a:t>
             </a:fld>
             <a:endParaRPr lang="en-US"/>
           </a:p>
@@ -1909,7 +1909,7 @@
           <a:p>
             <a:fld id="{5BCAD085-E8A6-8845-BD4E-CB4CCA059FC4}" type="datetimeFigureOut">
               <a:rPr lang="en-US" smtClean="0"/>
-              <a:t>7/5/26</a:t>
+              <a:t>7/6/26</a:t>
             </a:fld>
             <a:endParaRPr lang="en-US"/>
           </a:p>
@@ -2004,7 +2004,7 @@
           <a:p>
             <a:fld id="{5BCAD085-E8A6-8845-BD4E-CB4CCA059FC4}" type="datetimeFigureOut">
               <a:rPr lang="en-US" smtClean="0"/>
-              <a:t>7/5/26</a:t>
+              <a:t>7/6/26</a:t>
             </a:fld>
             <a:endParaRPr lang="en-US"/>
           </a:p>
@@ -2279,7 +2279,7 @@
           <a:p>
             <a:fld id="{5BCAD085-E8A6-8845-BD4E-CB4CCA059FC4}" type="datetimeFigureOut">
               <a:rPr lang="en-US" smtClean="0"/>
-              <a:t>7/5/26</a:t>
+              <a:t>7/6/26</a:t>
             </a:fld>
             <a:endParaRPr lang="en-US"/>
           </a:p>
@@ -2531,7 +2531,7 @@
           <a:p>
             <a:fld id="{5BCAD085-E8A6-8845-BD4E-CB4CCA059FC4}" type="datetimeFigureOut">
               <a:rPr lang="en-US" smtClean="0"/>
-              <a:t>7/5/26</a:t>
+              <a:t>7/6/26</a:t>
             </a:fld>
             <a:endParaRPr lang="en-US"/>
           </a:p>
@@ -2742,7 +2742,7 @@
           <a:p>
             <a:fld id="{5BCAD085-E8A6-8845-BD4E-CB4CCA059FC4}" type="datetimeFigureOut">
               <a:rPr lang="en-US" smtClean="0"/>
-              <a:t>7/5/26</a:t>
+              <a:t>7/6/26</a:t>
             </a:fld>
             <a:endParaRPr lang="en-US"/>
           </a:p>
@@ -3495,7 +3495,7 @@
         </p:blipFill>
         <p:spPr>
           <a:xfrm>
-            <a:off x="502920" y="1680210"/>
+            <a:off x="411480" y="1513157"/>
             <a:ext cx="4160520" cy="2366010"/>
           </a:xfrm>
           <a:prstGeom prst="rect">
@@ -4315,7 +4315,34 @@
                 <a:ea typeface="Meiryo"/>
                 <a:cs typeface="Times New Roman"/>
               </a:rPr>
-              <a:t>・ 比較条件は、同じ train/test 分割、同じ標準化済み説明変数、同じ評価指標</a:t>
+              <a:t>・ 比較条件は、同じ train/test 分割、同じ標準化済み説明変数、</a:t>
+            </a:r>
+            <a:endParaRPr lang="en-US" sz="2250" b="0">
+              <a:solidFill>
+                <a:srgbClr val="000000"/>
+              </a:solidFill>
+              <a:latin typeface="Times New Roman"/>
+              <a:ea typeface="Meiryo"/>
+              <a:cs typeface="Times New Roman"/>
+            </a:endParaRPr>
+          </a:p>
+          <a:p>
+            <a:pPr>
+              <a:spcAft>
+                <a:spcPts val="800"/>
+              </a:spcAft>
+              <a:defRPr sz="2250"/>
+            </a:pPr>
+            <a:r>
+              <a:rPr sz="2250" b="0">
+                <a:solidFill>
+                  <a:srgbClr val="000000"/>
+                </a:solidFill>
+                <a:latin typeface="Times New Roman"/>
+                <a:ea typeface="Meiryo"/>
+                <a:cs typeface="Times New Roman"/>
+              </a:rPr>
+              <a:t>同じ評価指標</a:t>
             </a:r>
           </a:p>
         </p:txBody>
@@ -7319,7 +7346,7 @@
         </p:nvSpPr>
         <p:spPr>
           <a:xfrm>
-            <a:off x="5212080" y="1234440"/>
+            <a:off x="5028354" y="1174494"/>
             <a:ext cx="3246120" cy="377190"/>
           </a:xfrm>
           <a:prstGeom prst="rect">
@@ -7362,8 +7389,8 @@
         </p:nvSpPr>
         <p:spPr>
           <a:xfrm>
-            <a:off x="5212079" y="1680210"/>
-            <a:ext cx="3738489" cy="1783080"/>
+            <a:off x="5028354" y="1519487"/>
+            <a:ext cx="4080472" cy="1471621"/>
           </a:xfrm>
           <a:prstGeom prst="rect">
             <a:avLst/>
@@ -7387,7 +7414,7 @@
               </a:defRPr>
             </a:pPr>
             <a:r>
-              <a:rPr sz="1800" b="0">
+              <a:rPr sz="2000" b="0">
                 <a:solidFill>
                   <a:srgbClr val="2D3741"/>
                 </a:solidFill>
@@ -7410,7 +7437,7 @@
               </a:defRPr>
             </a:pPr>
             <a:r>
-              <a:rPr sz="1800" b="0">
+              <a:rPr sz="2000" b="0">
                 <a:solidFill>
                   <a:srgbClr val="2D3741"/>
                 </a:solidFill>
@@ -7433,7 +7460,7 @@
               </a:defRPr>
             </a:pPr>
             <a:r>
-              <a:rPr sz="1800" b="0">
+              <a:rPr sz="2000" b="0">
                 <a:solidFill>
                   <a:srgbClr val="2D3741"/>
                 </a:solidFill>
@@ -7456,7 +7483,7 @@
               </a:defRPr>
             </a:pPr>
             <a:r>
-              <a:rPr sz="1800" b="0">
+              <a:rPr sz="2000" b="0">
                 <a:solidFill>
                   <a:srgbClr val="2D3741"/>
                 </a:solidFill>
@@ -7477,8 +7504,8 @@
         </p:nvSpPr>
         <p:spPr>
           <a:xfrm>
-            <a:off x="5180433" y="3137535"/>
-            <a:ext cx="3738489" cy="720090"/>
+            <a:off x="5037950" y="3155822"/>
+            <a:ext cx="4080473" cy="720090"/>
           </a:xfrm>
           <a:prstGeom prst="rect">
             <a:avLst/>
@@ -7523,7 +7550,7 @@
               </a:defRPr>
             </a:pPr>
             <a:r>
-              <a:rPr sz="1600" b="1">
+              <a:rPr b="1">
                 <a:solidFill>
                   <a:srgbClr val="1C487D"/>
                 </a:solidFill>
@@ -7544,7 +7571,7 @@
         </p:nvSpPr>
         <p:spPr>
           <a:xfrm>
-            <a:off x="5204674" y="4246368"/>
+            <a:off x="5044222" y="4192524"/>
             <a:ext cx="3291840" cy="342900"/>
           </a:xfrm>
           <a:prstGeom prst="rect">
@@ -7554,7 +7581,7 @@
         </p:spPr>
         <p:txBody>
           <a:bodyPr wrap="square" lIns="36576" tIns="18288" rIns="36576" bIns="18288">
-            <a:normAutofit/>
+            <a:noAutofit/>
           </a:bodyPr>
           <a:lstStyle/>
           <a:p>
@@ -7569,7 +7596,7 @@
               </a:defRPr>
             </a:pPr>
             <a:r>
-              <a:rPr sz="1750" b="1">
+              <a:rPr sz="2000" b="1">
                 <a:solidFill>
                   <a:srgbClr val="1C487D"/>
                 </a:solidFill>
@@ -7590,8 +7617,8 @@
         </p:nvSpPr>
         <p:spPr>
           <a:xfrm>
-            <a:off x="5180433" y="4534439"/>
-            <a:ext cx="3843997" cy="1950134"/>
+            <a:off x="5044222" y="4566197"/>
+            <a:ext cx="4074201" cy="1950134"/>
           </a:xfrm>
           <a:prstGeom prst="rect">
             <a:avLst/>
@@ -7615,7 +7642,7 @@
               </a:defRPr>
             </a:pPr>
             <a:r>
-              <a:rPr b="0">
+              <a:rPr sz="2000" b="0">
                 <a:solidFill>
                   <a:srgbClr val="2D3741"/>
                 </a:solidFill>
@@ -7638,7 +7665,7 @@
               </a:defRPr>
             </a:pPr>
             <a:r>
-              <a:rPr b="0">
+              <a:rPr sz="2000" b="0">
                 <a:solidFill>
                   <a:srgbClr val="2D3741"/>
                 </a:solidFill>
@@ -7660,7 +7687,7 @@
                 </a:solidFill>
               </a:defRPr>
             </a:pPr>
-            <a:endParaRPr b="0">
+            <a:endParaRPr sz="2000" b="0">
               <a:solidFill>
                 <a:srgbClr val="2D3741"/>
               </a:solidFill>
@@ -7681,7 +7708,7 @@
               </a:defRPr>
             </a:pPr>
             <a:r>
-              <a:rPr b="0">
+              <a:rPr sz="2000" b="0">
                 <a:solidFill>
                   <a:srgbClr val="2D3741"/>
                 </a:solidFill>
@@ -13732,7 +13759,7 @@
         </p:blipFill>
         <p:spPr>
           <a:xfrm>
-            <a:off x="457200" y="1817370"/>
+            <a:off x="0" y="1834515"/>
             <a:ext cx="5577840" cy="3188970"/>
           </a:xfrm>
           <a:prstGeom prst="rect">
@@ -13748,8 +13775,8 @@
         </p:nvSpPr>
         <p:spPr>
           <a:xfrm>
-            <a:off x="6217920" y="1234440"/>
-            <a:ext cx="2743200" cy="4011929"/>
+            <a:off x="5714999" y="1423035"/>
+            <a:ext cx="3358662" cy="4011929"/>
           </a:xfrm>
           <a:prstGeom prst="rect">
             <a:avLst/>
@@ -13758,7 +13785,7 @@
         </p:spPr>
         <p:txBody>
           <a:bodyPr wrap="square" lIns="36576" tIns="18288" rIns="36576" bIns="18288">
-            <a:normAutofit/>
+            <a:noAutofit/>
           </a:bodyPr>
           <a:lstStyle/>
           <a:p>
@@ -13769,7 +13796,7 @@
               <a:defRPr sz="2050"/>
             </a:pPr>
             <a:r>
-              <a:rPr sz="2050" b="0">
+              <a:rPr sz="2400" b="0">
                 <a:solidFill>
                   <a:srgbClr val="000000"/>
                 </a:solidFill>
@@ -13788,7 +13815,7 @@
               <a:defRPr sz="2050"/>
             </a:pPr>
             <a:r>
-              <a:rPr sz="2050" b="0">
+              <a:rPr sz="2400" b="0">
                 <a:solidFill>
                   <a:srgbClr val="000000"/>
                 </a:solidFill>
@@ -13807,7 +13834,7 @@
               <a:defRPr sz="2050"/>
             </a:pPr>
             <a:r>
-              <a:rPr sz="2050" b="0">
+              <a:rPr sz="2400" b="0">
                 <a:solidFill>
                   <a:srgbClr val="000000"/>
                 </a:solidFill>
@@ -13815,8 +13842,16 @@
                 <a:ea typeface="Meiryo"/>
                 <a:cs typeface="Times New Roman"/>
               </a:rPr>
-              <a:t>・ 右側ほど、学習データの中でも周囲が疎な点</a:t>
-            </a:r>
+              <a:t>・ 右側ほど、学習</a:t>
+            </a:r>
+            <a:endParaRPr lang="en-US" sz="2400" b="0">
+              <a:solidFill>
+                <a:srgbClr val="000000"/>
+              </a:solidFill>
+              <a:latin typeface="Times New Roman"/>
+              <a:ea typeface="Meiryo"/>
+              <a:cs typeface="Times New Roman"/>
+            </a:endParaRPr>
           </a:p>
           <a:p>
             <a:pPr>
@@ -13826,7 +13861,7 @@
               <a:defRPr sz="2050"/>
             </a:pPr>
             <a:r>
-              <a:rPr sz="2050" b="0">
+              <a:rPr sz="2400" b="0">
                 <a:solidFill>
                   <a:srgbClr val="000000"/>
                 </a:solidFill>
@@ -13834,7 +13869,53 @@
                 <a:ea typeface="Meiryo"/>
                 <a:cs typeface="Times New Roman"/>
               </a:rPr>
-              <a:t>・ しきい値は test から作らず、train の分布だけで決める</a:t>
+              <a:t>データの中でも周囲が疎な点</a:t>
+            </a:r>
+          </a:p>
+          <a:p>
+            <a:pPr>
+              <a:spcAft>
+                <a:spcPts val="800"/>
+              </a:spcAft>
+              <a:defRPr sz="2050"/>
+            </a:pPr>
+            <a:r>
+              <a:rPr sz="2400" b="0">
+                <a:solidFill>
+                  <a:srgbClr val="000000"/>
+                </a:solidFill>
+                <a:latin typeface="Times New Roman"/>
+                <a:ea typeface="Meiryo"/>
+                <a:cs typeface="Times New Roman"/>
+              </a:rPr>
+              <a:t>・ しきい値は test から作らず、train の分布</a:t>
+            </a:r>
+            <a:endParaRPr lang="en-US" sz="2400" b="0">
+              <a:solidFill>
+                <a:srgbClr val="000000"/>
+              </a:solidFill>
+              <a:latin typeface="Times New Roman"/>
+              <a:ea typeface="Meiryo"/>
+              <a:cs typeface="Times New Roman"/>
+            </a:endParaRPr>
+          </a:p>
+          <a:p>
+            <a:pPr>
+              <a:spcAft>
+                <a:spcPts val="800"/>
+              </a:spcAft>
+              <a:defRPr sz="2050"/>
+            </a:pPr>
+            <a:r>
+              <a:rPr sz="2400" b="0">
+                <a:solidFill>
+                  <a:srgbClr val="000000"/>
+                </a:solidFill>
+                <a:latin typeface="Times New Roman"/>
+                <a:ea typeface="Meiryo"/>
+                <a:cs typeface="Times New Roman"/>
+              </a:rPr>
+              <a:t>だけで決める</a:t>
             </a:r>
           </a:p>
         </p:txBody>
@@ -13980,7 +14061,7 @@
         </p:blipFill>
         <p:spPr>
           <a:xfrm>
-            <a:off x="457200" y="1817370"/>
+            <a:off x="0" y="1868805"/>
             <a:ext cx="5577840" cy="3120390"/>
           </a:xfrm>
           <a:prstGeom prst="rect">
@@ -13996,8 +14077,8 @@
         </p:nvSpPr>
         <p:spPr>
           <a:xfrm>
-            <a:off x="6172200" y="1234440"/>
-            <a:ext cx="2880360" cy="4011929"/>
+            <a:off x="5577840" y="1703070"/>
+            <a:ext cx="3474720" cy="3451860"/>
           </a:xfrm>
           <a:prstGeom prst="rect">
             <a:avLst/>
@@ -14006,7 +14087,7 @@
         </p:spPr>
         <p:txBody>
           <a:bodyPr wrap="square" lIns="36576" tIns="18288" rIns="36576" bIns="18288">
-            <a:normAutofit/>
+            <a:normAutofit lnSpcReduction="10000"/>
           </a:bodyPr>
           <a:lstStyle/>
           <a:p>
@@ -14017,7 +14098,7 @@
               <a:defRPr sz="2050"/>
             </a:pPr>
             <a:r>
-              <a:rPr sz="2050" b="0">
+              <a:rPr sz="2400" b="0">
                 <a:solidFill>
                   <a:srgbClr val="000000"/>
                 </a:solidFill>
@@ -14025,8 +14106,16 @@
                 <a:ea typeface="Meiryo"/>
                 <a:cs typeface="Times New Roman"/>
               </a:rPr>
-              <a:t>・ 横軸: test の 5 近傍平均距離</a:t>
-            </a:r>
+              <a:t>・ 横軸: test の 5 近傍</a:t>
+            </a:r>
+            <a:endParaRPr lang="en-US" sz="2400" b="0">
+              <a:solidFill>
+                <a:srgbClr val="000000"/>
+              </a:solidFill>
+              <a:latin typeface="Times New Roman"/>
+              <a:ea typeface="Meiryo"/>
+              <a:cs typeface="Times New Roman"/>
+            </a:endParaRPr>
           </a:p>
           <a:p>
             <a:pPr>
@@ -14036,7 +14125,7 @@
               <a:defRPr sz="2050"/>
             </a:pPr>
             <a:r>
-              <a:rPr sz="2050" b="0">
+              <a:rPr sz="2400" b="0">
                 <a:solidFill>
                   <a:srgbClr val="000000"/>
                 </a:solidFill>
@@ -14044,7 +14133,7 @@
                 <a:ea typeface="Meiryo"/>
                 <a:cs typeface="Times New Roman"/>
               </a:rPr>
-              <a:t>・ 縦軸: 絶対誤差 |actual - predicted|</a:t>
+              <a:t>平均距離</a:t>
             </a:r>
           </a:p>
           <a:p>
@@ -14055,7 +14144,53 @@
               <a:defRPr sz="2050"/>
             </a:pPr>
             <a:r>
-              <a:rPr sz="2050" b="0">
+              <a:rPr sz="2400" b="0">
+                <a:solidFill>
+                  <a:srgbClr val="000000"/>
+                </a:solidFill>
+                <a:latin typeface="Times New Roman"/>
+                <a:ea typeface="Meiryo"/>
+                <a:cs typeface="Times New Roman"/>
+              </a:rPr>
+              <a:t>・ 縦軸: 絶対誤差</a:t>
+            </a:r>
+            <a:endParaRPr lang="en-US" sz="2400" b="0">
+              <a:solidFill>
+                <a:srgbClr val="000000"/>
+              </a:solidFill>
+              <a:latin typeface="Times New Roman"/>
+              <a:ea typeface="Meiryo"/>
+              <a:cs typeface="Times New Roman"/>
+            </a:endParaRPr>
+          </a:p>
+          <a:p>
+            <a:pPr>
+              <a:spcAft>
+                <a:spcPts val="800"/>
+              </a:spcAft>
+              <a:defRPr sz="2050"/>
+            </a:pPr>
+            <a:r>
+              <a:rPr sz="2400" b="0">
+                <a:solidFill>
+                  <a:srgbClr val="000000"/>
+                </a:solidFill>
+                <a:latin typeface="Times New Roman"/>
+                <a:ea typeface="Meiryo"/>
+                <a:cs typeface="Times New Roman"/>
+              </a:rPr>
+              <a:t> |actual - predicted|</a:t>
+            </a:r>
+          </a:p>
+          <a:p>
+            <a:pPr>
+              <a:spcAft>
+                <a:spcPts val="800"/>
+              </a:spcAft>
+              <a:defRPr sz="2050"/>
+            </a:pPr>
+            <a:r>
+              <a:rPr sz="2400" b="0">
                 <a:solidFill>
                   <a:srgbClr val="000000"/>
                 </a:solidFill>
@@ -14074,7 +14209,7 @@
               <a:defRPr sz="2050"/>
             </a:pPr>
             <a:r>
-              <a:rPr sz="2050" b="0">
+              <a:rPr sz="2400" b="0">
                 <a:solidFill>
                   <a:srgbClr val="000000"/>
                 </a:solidFill>
@@ -14082,7 +14217,34 @@
                 <a:ea typeface="Meiryo"/>
                 <a:cs typeface="Times New Roman"/>
               </a:rPr>
-              <a:t>・ AD 外では誤差が大きくなりやすい傾向を確認する</a:t>
+              <a:t>・ AD 外では誤差が</a:t>
+            </a:r>
+            <a:endParaRPr lang="en-US" sz="2400" b="0">
+              <a:solidFill>
+                <a:srgbClr val="000000"/>
+              </a:solidFill>
+              <a:latin typeface="Times New Roman"/>
+              <a:ea typeface="Meiryo"/>
+              <a:cs typeface="Times New Roman"/>
+            </a:endParaRPr>
+          </a:p>
+          <a:p>
+            <a:pPr>
+              <a:spcAft>
+                <a:spcPts val="800"/>
+              </a:spcAft>
+              <a:defRPr sz="2050"/>
+            </a:pPr>
+            <a:r>
+              <a:rPr sz="2400" b="0">
+                <a:solidFill>
+                  <a:srgbClr val="000000"/>
+                </a:solidFill>
+                <a:latin typeface="Times New Roman"/>
+                <a:ea typeface="Meiryo"/>
+                <a:cs typeface="Times New Roman"/>
+              </a:rPr>
+              <a:t>大きくなりやすい傾向を確認する</a:t>
             </a:r>
           </a:p>
         </p:txBody>
@@ -14228,7 +14390,7 @@
         </p:blipFill>
         <p:spPr>
           <a:xfrm>
-            <a:off x="822960" y="1508760"/>
+            <a:off x="304214" y="1371600"/>
             <a:ext cx="3931920" cy="4114800"/>
           </a:xfrm>
           <a:prstGeom prst="rect">
@@ -14244,8 +14406,8 @@
         </p:nvSpPr>
         <p:spPr>
           <a:xfrm>
-            <a:off x="5166359" y="1303020"/>
-            <a:ext cx="3794760" cy="3806190"/>
+            <a:off x="4976445" y="1525905"/>
+            <a:ext cx="3931920" cy="3806190"/>
           </a:xfrm>
           <a:prstGeom prst="rect">
             <a:avLst/>
@@ -14265,7 +14427,7 @@
               <a:defRPr sz="2150"/>
             </a:pPr>
             <a:r>
-              <a:rPr sz="2150" b="0">
+              <a:rPr sz="2400" b="0">
                 <a:solidFill>
                   <a:srgbClr val="000000"/>
                 </a:solidFill>
@@ -14273,8 +14435,16 @@
                 <a:ea typeface="Meiryo"/>
                 <a:cs typeface="Times New Roman"/>
               </a:rPr>
-              <a:t>・ 点が対角線に近いほど予測が良い</a:t>
-            </a:r>
+              <a:t>・ 点が対角線に近いほど</a:t>
+            </a:r>
+            <a:endParaRPr lang="en-US" sz="2400" b="0">
+              <a:solidFill>
+                <a:srgbClr val="000000"/>
+              </a:solidFill>
+              <a:latin typeface="Times New Roman"/>
+              <a:ea typeface="Meiryo"/>
+              <a:cs typeface="Times New Roman"/>
+            </a:endParaRPr>
           </a:p>
           <a:p>
             <a:pPr>
@@ -14284,7 +14454,26 @@
               <a:defRPr sz="2150"/>
             </a:pPr>
             <a:r>
-              <a:rPr sz="2150" b="0">
+              <a:rPr sz="2400" b="0">
+                <a:solidFill>
+                  <a:srgbClr val="000000"/>
+                </a:solidFill>
+                <a:latin typeface="Times New Roman"/>
+                <a:ea typeface="Meiryo"/>
+                <a:cs typeface="Times New Roman"/>
+              </a:rPr>
+              <a:t>予測が良い</a:t>
+            </a:r>
+          </a:p>
+          <a:p>
+            <a:pPr>
+              <a:spcAft>
+                <a:spcPts val="800"/>
+              </a:spcAft>
+              <a:defRPr sz="2150"/>
+            </a:pPr>
+            <a:r>
+              <a:rPr sz="2400" b="0">
                 <a:solidFill>
                   <a:srgbClr val="000000"/>
                 </a:solidFill>
@@ -14303,7 +14492,7 @@
               <a:defRPr sz="2150"/>
             </a:pPr>
             <a:r>
-              <a:rPr sz="2150" b="0">
+              <a:rPr sz="2400" b="0">
                 <a:solidFill>
                   <a:srgbClr val="000000"/>
                 </a:solidFill>
@@ -14311,8 +14500,16 @@
                 <a:ea typeface="Meiryo"/>
                 <a:cs typeface="Times New Roman"/>
               </a:rPr>
-              <a:t>・ AD 外の点は予測値の信頼性を低めに扱う</a:t>
-            </a:r>
+              <a:t>・ AD 外の点は予測値の</a:t>
+            </a:r>
+            <a:endParaRPr lang="en-US" sz="2400" b="0">
+              <a:solidFill>
+                <a:srgbClr val="000000"/>
+              </a:solidFill>
+              <a:latin typeface="Times New Roman"/>
+              <a:ea typeface="Meiryo"/>
+              <a:cs typeface="Times New Roman"/>
+            </a:endParaRPr>
           </a:p>
           <a:p>
             <a:pPr>
@@ -14322,7 +14519,26 @@
               <a:defRPr sz="2150"/>
             </a:pPr>
             <a:r>
-              <a:rPr sz="2150" b="0">
+              <a:rPr sz="2400" b="0">
+                <a:solidFill>
+                  <a:srgbClr val="000000"/>
+                </a:solidFill>
+                <a:latin typeface="Times New Roman"/>
+                <a:ea typeface="Meiryo"/>
+                <a:cs typeface="Times New Roman"/>
+              </a:rPr>
+              <a:t>信頼性を低めに扱う</a:t>
+            </a:r>
+          </a:p>
+          <a:p>
+            <a:pPr>
+              <a:spcAft>
+                <a:spcPts val="800"/>
+              </a:spcAft>
+              <a:defRPr sz="2150"/>
+            </a:pPr>
+            <a:r>
+              <a:rPr sz="2400" b="0">
                 <a:solidFill>
                   <a:srgbClr val="000000"/>
                 </a:solidFill>
@@ -14466,11 +14682,17 @@
           <p:cNvGraphicFramePr>
             <a:graphicFrameLocks noGrp="1"/>
           </p:cNvGraphicFramePr>
-          <p:nvPr/>
+          <p:nvPr>
+            <p:extLst>
+              <p:ext uri="{D42A27DB-BD31-4B8C-83A1-F6EECF244321}">
+                <p14:modId xmlns:p14="http://schemas.microsoft.com/office/powerpoint/2010/main" val="2872832433"/>
+              </p:ext>
+            </p:extLst>
+          </p:nvPr>
         </p:nvGraphicFramePr>
         <p:xfrm>
-          <a:off x="548640" y="1179576"/>
-          <a:ext cx="7908426" cy="1417320"/>
+          <a:off x="411479" y="1179576"/>
+          <a:ext cx="8321041" cy="1417320"/>
         </p:xfrm>
         <a:graphic>
           <a:graphicData uri="http://schemas.openxmlformats.org/drawingml/2006/table">
@@ -14479,35 +14701,35 @@
                 <a:tableStyleId>{5C22544A-7EE6-4342-B048-85BDC9FD1C3A}</a:tableStyleId>
               </a:tblPr>
               <a:tblGrid>
-                <a:gridCol w="1031534">
+                <a:gridCol w="1085353">
                   <a:extLst>
                     <a:ext uri="{9D8B030D-6E8A-4147-A177-3AD203B41FA5}">
                       <a16:colId xmlns:a16="http://schemas.microsoft.com/office/drawing/2014/main" val="20000"/>
                     </a:ext>
                   </a:extLst>
                 </a:gridCol>
-                <a:gridCol w="1719223">
+                <a:gridCol w="1808922">
                   <a:extLst>
                     <a:ext uri="{9D8B030D-6E8A-4147-A177-3AD203B41FA5}">
                       <a16:colId xmlns:a16="http://schemas.microsoft.com/office/drawing/2014/main" val="20001"/>
                     </a:ext>
                   </a:extLst>
                 </a:gridCol>
-                <a:gridCol w="1719223">
+                <a:gridCol w="1808922">
                   <a:extLst>
                     <a:ext uri="{9D8B030D-6E8A-4147-A177-3AD203B41FA5}">
                       <a16:colId xmlns:a16="http://schemas.microsoft.com/office/drawing/2014/main" val="20002"/>
                     </a:ext>
                   </a:extLst>
                 </a:gridCol>
-                <a:gridCol w="1719223">
+                <a:gridCol w="1808922">
                   <a:extLst>
                     <a:ext uri="{9D8B030D-6E8A-4147-A177-3AD203B41FA5}">
                       <a16:colId xmlns:a16="http://schemas.microsoft.com/office/drawing/2014/main" val="20003"/>
                     </a:ext>
                   </a:extLst>
                 </a:gridCol>
-                <a:gridCol w="1719223">
+                <a:gridCol w="1808922">
                   <a:extLst>
                     <a:ext uri="{9D8B030D-6E8A-4147-A177-3AD203B41FA5}">
                       <a16:colId xmlns:a16="http://schemas.microsoft.com/office/drawing/2014/main" val="20004"/>
@@ -14521,11 +14743,11 @@
                     <a:bodyPr/>
                     <a:lstStyle/>
                     <a:p>
-                      <a:pPr algn="l">
+                      <a:pPr algn="ctr">
                         <a:defRPr sz="1850"/>
                       </a:pPr>
                       <a:r>
-                        <a:rPr sz="1850" b="1">
+                        <a:rPr sz="2000" b="1">
                           <a:solidFill>
                             <a:srgbClr val="000000"/>
                           </a:solidFill>
@@ -14537,7 +14759,7 @@
                       </a:r>
                     </a:p>
                   </a:txBody>
-                  <a:tcPr marL="54864" marR="54864" marT="27432" marB="27432">
+                  <a:tcPr marL="54864" marR="54864" marT="27432" marB="27432" anchor="ctr">
                     <a:solidFill>
                       <a:srgbClr val="D9D9D9"/>
                     </a:solidFill>
@@ -14552,7 +14774,7 @@
                         <a:defRPr sz="1850"/>
                       </a:pPr>
                       <a:r>
-                        <a:rPr sz="1850" b="1">
+                        <a:rPr sz="2000" b="1">
                           <a:solidFill>
                             <a:srgbClr val="000000"/>
                           </a:solidFill>
@@ -14564,7 +14786,7 @@
                       </a:r>
                     </a:p>
                   </a:txBody>
-                  <a:tcPr marL="54864" marR="54864" marT="27432" marB="27432">
+                  <a:tcPr marL="54864" marR="54864" marT="27432" marB="27432" anchor="ctr">
                     <a:solidFill>
                       <a:srgbClr val="D9D9D9"/>
                     </a:solidFill>
@@ -14579,7 +14801,7 @@
                         <a:defRPr sz="1850"/>
                       </a:pPr>
                       <a:r>
-                        <a:rPr sz="1850" b="1">
+                        <a:rPr sz="2000" b="1">
                           <a:solidFill>
                             <a:srgbClr val="000000"/>
                           </a:solidFill>
@@ -14591,7 +14813,7 @@
                       </a:r>
                     </a:p>
                   </a:txBody>
-                  <a:tcPr marL="54864" marR="54864" marT="27432" marB="27432">
+                  <a:tcPr marL="54864" marR="54864" marT="27432" marB="27432" anchor="ctr">
                     <a:solidFill>
                       <a:srgbClr val="D9D9D9"/>
                     </a:solidFill>
@@ -14606,7 +14828,7 @@
                         <a:defRPr sz="1850"/>
                       </a:pPr>
                       <a:r>
-                        <a:rPr sz="1850" b="1">
+                        <a:rPr sz="2000" b="1">
                           <a:solidFill>
                             <a:srgbClr val="000000"/>
                           </a:solidFill>
@@ -14618,7 +14840,7 @@
                       </a:r>
                     </a:p>
                   </a:txBody>
-                  <a:tcPr marL="54864" marR="54864" marT="27432" marB="27432">
+                  <a:tcPr marL="54864" marR="54864" marT="27432" marB="27432" anchor="ctr">
                     <a:solidFill>
                       <a:srgbClr val="D9D9D9"/>
                     </a:solidFill>
@@ -14633,7 +14855,7 @@
                         <a:defRPr sz="1850"/>
                       </a:pPr>
                       <a:r>
-                        <a:rPr sz="1850" b="1">
+                        <a:rPr sz="2000" b="1">
                           <a:solidFill>
                             <a:srgbClr val="000000"/>
                           </a:solidFill>
@@ -14645,7 +14867,7 @@
                       </a:r>
                     </a:p>
                   </a:txBody>
-                  <a:tcPr marL="54864" marR="54864" marT="27432" marB="27432">
+                  <a:tcPr marL="54864" marR="54864" marT="27432" marB="27432" anchor="ctr">
                     <a:solidFill>
                       <a:srgbClr val="D9D9D9"/>
                     </a:solidFill>
@@ -14663,11 +14885,11 @@
                     <a:bodyPr/>
                     <a:lstStyle/>
                     <a:p>
-                      <a:pPr algn="l">
+                      <a:pPr algn="ctr">
                         <a:defRPr sz="1850"/>
                       </a:pPr>
                       <a:r>
-                        <a:rPr sz="1850" b="0">
+                        <a:rPr sz="2000" b="0">
                           <a:solidFill>
                             <a:srgbClr val="000000"/>
                           </a:solidFill>
@@ -14679,7 +14901,7 @@
                       </a:r>
                     </a:p>
                   </a:txBody>
-                  <a:tcPr marL="54864" marR="54864" marT="27432" marB="27432">
+                  <a:tcPr marL="54864" marR="54864" marT="27432" marB="27432" anchor="ctr">
                     <a:solidFill>
                       <a:srgbClr val="FFFFFF"/>
                     </a:solidFill>
@@ -14694,7 +14916,7 @@
                         <a:defRPr sz="1850"/>
                       </a:pPr>
                       <a:r>
-                        <a:rPr sz="1850" b="0">
+                        <a:rPr sz="2000" b="0">
                           <a:solidFill>
                             <a:srgbClr val="000000"/>
                           </a:solidFill>
@@ -14706,7 +14928,7 @@
                       </a:r>
                     </a:p>
                   </a:txBody>
-                  <a:tcPr marL="54864" marR="54864" marT="27432" marB="27432">
+                  <a:tcPr marL="54864" marR="54864" marT="27432" marB="27432" anchor="ctr">
                     <a:solidFill>
                       <a:srgbClr val="FFFFFF"/>
                     </a:solidFill>
@@ -14721,7 +14943,7 @@
                         <a:defRPr sz="1850"/>
                       </a:pPr>
                       <a:r>
-                        <a:rPr sz="1850" b="0">
+                        <a:rPr sz="2000" b="0">
                           <a:solidFill>
                             <a:srgbClr val="000000"/>
                           </a:solidFill>
@@ -14733,7 +14955,7 @@
                       </a:r>
                     </a:p>
                   </a:txBody>
-                  <a:tcPr marL="54864" marR="54864" marT="27432" marB="27432">
+                  <a:tcPr marL="54864" marR="54864" marT="27432" marB="27432" anchor="ctr">
                     <a:solidFill>
                       <a:srgbClr val="FFFFFF"/>
                     </a:solidFill>
@@ -14748,7 +14970,7 @@
                         <a:defRPr sz="1850"/>
                       </a:pPr>
                       <a:r>
-                        <a:rPr sz="1850" b="0">
+                        <a:rPr sz="2000" b="0">
                           <a:solidFill>
                             <a:srgbClr val="000000"/>
                           </a:solidFill>
@@ -14760,7 +14982,7 @@
                       </a:r>
                     </a:p>
                   </a:txBody>
-                  <a:tcPr marL="54864" marR="54864" marT="27432" marB="27432">
+                  <a:tcPr marL="54864" marR="54864" marT="27432" marB="27432" anchor="ctr">
                     <a:solidFill>
                       <a:srgbClr val="FFFFFF"/>
                     </a:solidFill>
@@ -14775,7 +14997,7 @@
                         <a:defRPr sz="1850"/>
                       </a:pPr>
                       <a:r>
-                        <a:rPr sz="1850" b="0">
+                        <a:rPr sz="2000" b="0">
                           <a:solidFill>
                             <a:srgbClr val="000000"/>
                           </a:solidFill>
@@ -14787,7 +15009,7 @@
                       </a:r>
                     </a:p>
                   </a:txBody>
-                  <a:tcPr marL="54864" marR="54864" marT="27432" marB="27432">
+                  <a:tcPr marL="54864" marR="54864" marT="27432" marB="27432" anchor="ctr">
                     <a:solidFill>
                       <a:srgbClr val="FFFFFF"/>
                     </a:solidFill>
@@ -14805,11 +15027,11 @@
                     <a:bodyPr/>
                     <a:lstStyle/>
                     <a:p>
-                      <a:pPr algn="l">
+                      <a:pPr algn="ctr">
                         <a:defRPr sz="1850"/>
                       </a:pPr>
                       <a:r>
-                        <a:rPr sz="1850" b="0">
+                        <a:rPr sz="2000" b="0">
                           <a:solidFill>
                             <a:srgbClr val="000000"/>
                           </a:solidFill>
@@ -14821,7 +15043,7 @@
                       </a:r>
                     </a:p>
                   </a:txBody>
-                  <a:tcPr marL="54864" marR="54864" marT="27432" marB="27432">
+                  <a:tcPr marL="54864" marR="54864" marT="27432" marB="27432" anchor="ctr">
                     <a:solidFill>
                       <a:srgbClr val="FFFFFF"/>
                     </a:solidFill>
@@ -14836,7 +15058,7 @@
                         <a:defRPr sz="1850"/>
                       </a:pPr>
                       <a:r>
-                        <a:rPr sz="1850" b="0">
+                        <a:rPr sz="2000" b="0">
                           <a:solidFill>
                             <a:srgbClr val="000000"/>
                           </a:solidFill>
@@ -14848,7 +15070,7 @@
                       </a:r>
                     </a:p>
                   </a:txBody>
-                  <a:tcPr marL="54864" marR="54864" marT="27432" marB="27432">
+                  <a:tcPr marL="54864" marR="54864" marT="27432" marB="27432" anchor="ctr">
                     <a:solidFill>
                       <a:srgbClr val="FFFFFF"/>
                     </a:solidFill>
@@ -14863,7 +15085,7 @@
                         <a:defRPr sz="1850"/>
                       </a:pPr>
                       <a:r>
-                        <a:rPr sz="1850" b="0">
+                        <a:rPr sz="2000" b="0">
                           <a:solidFill>
                             <a:srgbClr val="000000"/>
                           </a:solidFill>
@@ -14875,7 +15097,7 @@
                       </a:r>
                     </a:p>
                   </a:txBody>
-                  <a:tcPr marL="54864" marR="54864" marT="27432" marB="27432">
+                  <a:tcPr marL="54864" marR="54864" marT="27432" marB="27432" anchor="ctr">
                     <a:solidFill>
                       <a:srgbClr val="FFFFFF"/>
                     </a:solidFill>
@@ -14890,7 +15112,7 @@
                         <a:defRPr sz="1850"/>
                       </a:pPr>
                       <a:r>
-                        <a:rPr sz="1850" b="0">
+                        <a:rPr sz="2000" b="0">
                           <a:solidFill>
                             <a:srgbClr val="000000"/>
                           </a:solidFill>
@@ -14902,7 +15124,7 @@
                       </a:r>
                     </a:p>
                   </a:txBody>
-                  <a:tcPr marL="54864" marR="54864" marT="27432" marB="27432">
+                  <a:tcPr marL="54864" marR="54864" marT="27432" marB="27432" anchor="ctr">
                     <a:solidFill>
                       <a:srgbClr val="FFFFFF"/>
                     </a:solidFill>
@@ -14917,7 +15139,7 @@
                         <a:defRPr sz="1850"/>
                       </a:pPr>
                       <a:r>
-                        <a:rPr sz="1850" b="0">
+                        <a:rPr sz="2000" b="0">
                           <a:solidFill>
                             <a:srgbClr val="000000"/>
                           </a:solidFill>
@@ -14929,7 +15151,7 @@
                       </a:r>
                     </a:p>
                   </a:txBody>
-                  <a:tcPr marL="54864" marR="54864" marT="27432" marB="27432">
+                  <a:tcPr marL="54864" marR="54864" marT="27432" marB="27432" anchor="ctr">
                     <a:solidFill>
                       <a:srgbClr val="FFFFFF"/>
                     </a:solidFill>
@@ -15037,8 +15259,8 @@
         </p:nvSpPr>
         <p:spPr>
           <a:xfrm>
-            <a:off x="594360" y="4251960"/>
-            <a:ext cx="7955280" cy="1440180"/>
+            <a:off x="468630" y="4192524"/>
+            <a:ext cx="8206740" cy="2267712"/>
           </a:xfrm>
           <a:prstGeom prst="rect">
             <a:avLst/>
@@ -15047,7 +15269,7 @@
         </p:spPr>
         <p:txBody>
           <a:bodyPr wrap="square" lIns="36576" tIns="18288" rIns="36576" bIns="18288">
-            <a:normAutofit fontScale="92500"/>
+            <a:noAutofit/>
           </a:bodyPr>
           <a:lstStyle/>
           <a:p>
@@ -15058,7 +15280,7 @@
               <a:defRPr sz="2050"/>
             </a:pPr>
             <a:r>
-              <a:rPr sz="2050" b="0">
+              <a:rPr sz="2400" b="0">
                 <a:solidFill>
                   <a:srgbClr val="000000"/>
                 </a:solidFill>
@@ -15077,7 +15299,7 @@
               <a:defRPr sz="2050"/>
             </a:pPr>
             <a:r>
-              <a:rPr sz="2050" b="0">
+              <a:rPr sz="2400" b="0">
                 <a:solidFill>
                   <a:srgbClr val="000000"/>
                 </a:solidFill>
@@ -15085,8 +15307,16 @@
                 <a:ea typeface="Meiryo"/>
                 <a:cs typeface="Times New Roman"/>
               </a:rPr>
-              <a:t>・ outside は 4 件だけなので、統計的に強い結論ではなく可視化による確認として扱う</a:t>
-            </a:r>
+              <a:t>・ outside は 4 件だけなので、統計的に強い結論ではなく</a:t>
+            </a:r>
+            <a:endParaRPr lang="en-US" sz="2400" b="0">
+              <a:solidFill>
+                <a:srgbClr val="000000"/>
+              </a:solidFill>
+              <a:latin typeface="Times New Roman"/>
+              <a:ea typeface="Meiryo"/>
+              <a:cs typeface="Times New Roman"/>
+            </a:endParaRPr>
           </a:p>
           <a:p>
             <a:pPr>
@@ -15096,7 +15326,26 @@
               <a:defRPr sz="2050"/>
             </a:pPr>
             <a:r>
-              <a:rPr sz="2050" b="0">
+              <a:rPr sz="2400" b="0">
+                <a:solidFill>
+                  <a:srgbClr val="000000"/>
+                </a:solidFill>
+                <a:latin typeface="Times New Roman"/>
+                <a:ea typeface="Meiryo"/>
+                <a:cs typeface="Times New Roman"/>
+              </a:rPr>
+              <a:t>可視化による確認として扱う</a:t>
+            </a:r>
+          </a:p>
+          <a:p>
+            <a:pPr>
+              <a:spcAft>
+                <a:spcPts val="800"/>
+              </a:spcAft>
+              <a:defRPr sz="2050"/>
+            </a:pPr>
+            <a:r>
+              <a:rPr sz="2400" b="0">
                 <a:solidFill>
                   <a:srgbClr val="000000"/>
                 </a:solidFill>
@@ -15240,11 +15489,17 @@
           <p:cNvGraphicFramePr>
             <a:graphicFrameLocks noGrp="1"/>
           </p:cNvGraphicFramePr>
-          <p:nvPr/>
+          <p:nvPr>
+            <p:extLst>
+              <p:ext uri="{D42A27DB-BD31-4B8C-83A1-F6EECF244321}">
+                <p14:modId xmlns:p14="http://schemas.microsoft.com/office/powerpoint/2010/main" val="2953475184"/>
+              </p:ext>
+            </p:extLst>
+          </p:nvPr>
         </p:nvGraphicFramePr>
         <p:xfrm>
-          <a:off x="457200" y="1110996"/>
-          <a:ext cx="8045963" cy="2240280"/>
+          <a:off x="411480" y="1110996"/>
+          <a:ext cx="8321040" cy="2240280"/>
         </p:xfrm>
         <a:graphic>
           <a:graphicData uri="http://schemas.openxmlformats.org/drawingml/2006/table">
@@ -15253,35 +15508,35 @@
                 <a:tableStyleId>{5C22544A-7EE6-4342-B048-85BDC9FD1C3A}</a:tableStyleId>
               </a:tblPr>
               <a:tblGrid>
-                <a:gridCol w="1444147">
+                <a:gridCol w="1493520">
                   <a:extLst>
                     <a:ext uri="{9D8B030D-6E8A-4147-A177-3AD203B41FA5}">
                       <a16:colId xmlns:a16="http://schemas.microsoft.com/office/drawing/2014/main" val="20000"/>
                     </a:ext>
                   </a:extLst>
                 </a:gridCol>
-                <a:gridCol w="1650454">
+                <a:gridCol w="1706880">
                   <a:extLst>
                     <a:ext uri="{9D8B030D-6E8A-4147-A177-3AD203B41FA5}">
                       <a16:colId xmlns:a16="http://schemas.microsoft.com/office/drawing/2014/main" val="20001"/>
                     </a:ext>
                   </a:extLst>
                 </a:gridCol>
-                <a:gridCol w="1650454">
+                <a:gridCol w="1706880">
                   <a:extLst>
                     <a:ext uri="{9D8B030D-6E8A-4147-A177-3AD203B41FA5}">
                       <a16:colId xmlns:a16="http://schemas.microsoft.com/office/drawing/2014/main" val="20002"/>
                     </a:ext>
                   </a:extLst>
                 </a:gridCol>
-                <a:gridCol w="1650454">
+                <a:gridCol w="1706880">
                   <a:extLst>
                     <a:ext uri="{9D8B030D-6E8A-4147-A177-3AD203B41FA5}">
                       <a16:colId xmlns:a16="http://schemas.microsoft.com/office/drawing/2014/main" val="20003"/>
                     </a:ext>
                   </a:extLst>
                 </a:gridCol>
-                <a:gridCol w="1650454">
+                <a:gridCol w="1706880">
                   <a:extLst>
                     <a:ext uri="{9D8B030D-6E8A-4147-A177-3AD203B41FA5}">
                       <a16:colId xmlns:a16="http://schemas.microsoft.com/office/drawing/2014/main" val="20004"/>
@@ -15295,11 +15550,11 @@
                     <a:bodyPr/>
                     <a:lstStyle/>
                     <a:p>
-                      <a:pPr algn="l">
+                      <a:pPr algn="ctr">
                         <a:defRPr sz="1630"/>
                       </a:pPr>
                       <a:r>
-                        <a:rPr sz="1630" b="1">
+                        <a:rPr sz="2000" b="1">
                           <a:solidFill>
                             <a:srgbClr val="000000"/>
                           </a:solidFill>
@@ -15311,7 +15566,7 @@
                       </a:r>
                     </a:p>
                   </a:txBody>
-                  <a:tcPr marL="54864" marR="54864" marT="27432" marB="27432">
+                  <a:tcPr marL="54864" marR="54864" marT="27432" marB="27432" anchor="ctr">
                     <a:solidFill>
                       <a:srgbClr val="D9D9D9"/>
                     </a:solidFill>
@@ -15326,7 +15581,7 @@
                         <a:defRPr sz="1630"/>
                       </a:pPr>
                       <a:r>
-                        <a:rPr sz="1630" b="1">
+                        <a:rPr sz="2000" b="1">
                           <a:solidFill>
                             <a:srgbClr val="000000"/>
                           </a:solidFill>
@@ -15338,7 +15593,7 @@
                       </a:r>
                     </a:p>
                   </a:txBody>
-                  <a:tcPr marL="54864" marR="54864" marT="27432" marB="27432">
+                  <a:tcPr marL="54864" marR="54864" marT="27432" marB="27432" anchor="ctr">
                     <a:solidFill>
                       <a:srgbClr val="D9D9D9"/>
                     </a:solidFill>
@@ -15353,7 +15608,7 @@
                         <a:defRPr sz="1630"/>
                       </a:pPr>
                       <a:r>
-                        <a:rPr sz="1630" b="1">
+                        <a:rPr sz="2000" b="1">
                           <a:solidFill>
                             <a:srgbClr val="000000"/>
                           </a:solidFill>
@@ -15365,7 +15620,7 @@
                       </a:r>
                     </a:p>
                   </a:txBody>
-                  <a:tcPr marL="54864" marR="54864" marT="27432" marB="27432">
+                  <a:tcPr marL="54864" marR="54864" marT="27432" marB="27432" anchor="ctr">
                     <a:solidFill>
                       <a:srgbClr val="D9D9D9"/>
                     </a:solidFill>
@@ -15380,7 +15635,7 @@
                         <a:defRPr sz="1630"/>
                       </a:pPr>
                       <a:r>
-                        <a:rPr sz="1630" b="1">
+                        <a:rPr sz="2000" b="1">
                           <a:solidFill>
                             <a:srgbClr val="000000"/>
                           </a:solidFill>
@@ -15392,7 +15647,7 @@
                       </a:r>
                     </a:p>
                   </a:txBody>
-                  <a:tcPr marL="54864" marR="54864" marT="27432" marB="27432">
+                  <a:tcPr marL="54864" marR="54864" marT="27432" marB="27432" anchor="ctr">
                     <a:solidFill>
                       <a:srgbClr val="D9D9D9"/>
                     </a:solidFill>
@@ -15407,7 +15662,7 @@
                         <a:defRPr sz="1630"/>
                       </a:pPr>
                       <a:r>
-                        <a:rPr sz="1630" b="1">
+                        <a:rPr sz="2000" b="1">
                           <a:solidFill>
                             <a:srgbClr val="000000"/>
                           </a:solidFill>
@@ -15419,7 +15674,7 @@
                       </a:r>
                     </a:p>
                   </a:txBody>
-                  <a:tcPr marL="54864" marR="54864" marT="27432" marB="27432">
+                  <a:tcPr marL="54864" marR="54864" marT="27432" marB="27432" anchor="ctr">
                     <a:solidFill>
                       <a:srgbClr val="D9D9D9"/>
                     </a:solidFill>
@@ -15437,11 +15692,11 @@
                     <a:bodyPr/>
                     <a:lstStyle/>
                     <a:p>
-                      <a:pPr algn="l">
+                      <a:pPr algn="ctr">
                         <a:defRPr sz="1630"/>
                       </a:pPr>
                       <a:r>
-                        <a:rPr sz="1630" b="0">
+                        <a:rPr sz="2000" b="0">
                           <a:solidFill>
                             <a:srgbClr val="000000"/>
                           </a:solidFill>
@@ -15453,7 +15708,7 @@
                       </a:r>
                     </a:p>
                   </a:txBody>
-                  <a:tcPr marL="54864" marR="54864" marT="27432" marB="27432">
+                  <a:tcPr marL="54864" marR="54864" marT="27432" marB="27432" anchor="ctr">
                     <a:solidFill>
                       <a:srgbClr val="FFFFFF"/>
                     </a:solidFill>
@@ -15468,7 +15723,7 @@
                         <a:defRPr sz="1630"/>
                       </a:pPr>
                       <a:r>
-                        <a:rPr sz="1630" b="0">
+                        <a:rPr sz="2000" b="0">
                           <a:solidFill>
                             <a:srgbClr val="000000"/>
                           </a:solidFill>
@@ -15480,7 +15735,7 @@
                       </a:r>
                     </a:p>
                   </a:txBody>
-                  <a:tcPr marL="54864" marR="54864" marT="27432" marB="27432">
+                  <a:tcPr marL="54864" marR="54864" marT="27432" marB="27432" anchor="ctr">
                     <a:solidFill>
                       <a:srgbClr val="FFFFFF"/>
                     </a:solidFill>
@@ -15495,7 +15750,7 @@
                         <a:defRPr sz="1630"/>
                       </a:pPr>
                       <a:r>
-                        <a:rPr sz="1630" b="0">
+                        <a:rPr sz="2000" b="0">
                           <a:solidFill>
                             <a:srgbClr val="000000"/>
                           </a:solidFill>
@@ -15507,7 +15762,7 @@
                       </a:r>
                     </a:p>
                   </a:txBody>
-                  <a:tcPr marL="54864" marR="54864" marT="27432" marB="27432">
+                  <a:tcPr marL="54864" marR="54864" marT="27432" marB="27432" anchor="ctr">
                     <a:solidFill>
                       <a:srgbClr val="FFFFFF"/>
                     </a:solidFill>
@@ -15522,7 +15777,7 @@
                         <a:defRPr sz="1630"/>
                       </a:pPr>
                       <a:r>
-                        <a:rPr sz="1630" b="0">
+                        <a:rPr sz="2000" b="0">
                           <a:solidFill>
                             <a:srgbClr val="000000"/>
                           </a:solidFill>
@@ -15534,7 +15789,7 @@
                       </a:r>
                     </a:p>
                   </a:txBody>
-                  <a:tcPr marL="54864" marR="54864" marT="27432" marB="27432">
+                  <a:tcPr marL="54864" marR="54864" marT="27432" marB="27432" anchor="ctr">
                     <a:solidFill>
                       <a:srgbClr val="FFFFFF"/>
                     </a:solidFill>
@@ -15549,7 +15804,7 @@
                         <a:defRPr sz="1630"/>
                       </a:pPr>
                       <a:r>
-                        <a:rPr sz="1630" b="0">
+                        <a:rPr sz="2000" b="0">
                           <a:solidFill>
                             <a:srgbClr val="000000"/>
                           </a:solidFill>
@@ -15561,7 +15816,7 @@
                       </a:r>
                     </a:p>
                   </a:txBody>
-                  <a:tcPr marL="54864" marR="54864" marT="27432" marB="27432">
+                  <a:tcPr marL="54864" marR="54864" marT="27432" marB="27432" anchor="ctr">
                     <a:solidFill>
                       <a:srgbClr val="FFFFFF"/>
                     </a:solidFill>
@@ -15579,11 +15834,11 @@
                     <a:bodyPr/>
                     <a:lstStyle/>
                     <a:p>
-                      <a:pPr algn="l">
+                      <a:pPr algn="ctr">
                         <a:defRPr sz="1630"/>
                       </a:pPr>
                       <a:r>
-                        <a:rPr sz="1630" b="0">
+                        <a:rPr sz="2000" b="0">
                           <a:solidFill>
                             <a:srgbClr val="000000"/>
                           </a:solidFill>
@@ -15595,7 +15850,7 @@
                       </a:r>
                     </a:p>
                   </a:txBody>
-                  <a:tcPr marL="54864" marR="54864" marT="27432" marB="27432">
+                  <a:tcPr marL="54864" marR="54864" marT="27432" marB="27432" anchor="ctr">
                     <a:solidFill>
                       <a:srgbClr val="FFFFFF"/>
                     </a:solidFill>
@@ -15610,7 +15865,7 @@
                         <a:defRPr sz="1630"/>
                       </a:pPr>
                       <a:r>
-                        <a:rPr sz="1630" b="0">
+                        <a:rPr sz="2000" b="0">
                           <a:solidFill>
                             <a:srgbClr val="000000"/>
                           </a:solidFill>
@@ -15622,7 +15877,7 @@
                       </a:r>
                     </a:p>
                   </a:txBody>
-                  <a:tcPr marL="54864" marR="54864" marT="27432" marB="27432">
+                  <a:tcPr marL="54864" marR="54864" marT="27432" marB="27432" anchor="ctr">
                     <a:solidFill>
                       <a:srgbClr val="FFFFFF"/>
                     </a:solidFill>
@@ -15637,7 +15892,7 @@
                         <a:defRPr sz="1630"/>
                       </a:pPr>
                       <a:r>
-                        <a:rPr sz="1630" b="0">
+                        <a:rPr sz="2000" b="0">
                           <a:solidFill>
                             <a:srgbClr val="000000"/>
                           </a:solidFill>
@@ -15649,7 +15904,7 @@
                       </a:r>
                     </a:p>
                   </a:txBody>
-                  <a:tcPr marL="54864" marR="54864" marT="27432" marB="27432">
+                  <a:tcPr marL="54864" marR="54864" marT="27432" marB="27432" anchor="ctr">
                     <a:solidFill>
                       <a:srgbClr val="FFFFFF"/>
                     </a:solidFill>
@@ -15664,7 +15919,7 @@
                         <a:defRPr sz="1630"/>
                       </a:pPr>
                       <a:r>
-                        <a:rPr sz="1630" b="0">
+                        <a:rPr sz="2000" b="0">
                           <a:solidFill>
                             <a:srgbClr val="000000"/>
                           </a:solidFill>
@@ -15676,7 +15931,7 @@
                       </a:r>
                     </a:p>
                   </a:txBody>
-                  <a:tcPr marL="54864" marR="54864" marT="27432" marB="27432">
+                  <a:tcPr marL="54864" marR="54864" marT="27432" marB="27432" anchor="ctr">
                     <a:solidFill>
                       <a:srgbClr val="FFFFFF"/>
                     </a:solidFill>
@@ -15691,7 +15946,7 @@
                         <a:defRPr sz="1630"/>
                       </a:pPr>
                       <a:r>
-                        <a:rPr sz="1630" b="0">
+                        <a:rPr sz="2000" b="0">
                           <a:solidFill>
                             <a:srgbClr val="000000"/>
                           </a:solidFill>
@@ -15703,7 +15958,7 @@
                       </a:r>
                     </a:p>
                   </a:txBody>
-                  <a:tcPr marL="54864" marR="54864" marT="27432" marB="27432">
+                  <a:tcPr marL="54864" marR="54864" marT="27432" marB="27432" anchor="ctr">
                     <a:solidFill>
                       <a:srgbClr val="FFFFFF"/>
                     </a:solidFill>
@@ -15721,11 +15976,11 @@
                     <a:bodyPr/>
                     <a:lstStyle/>
                     <a:p>
-                      <a:pPr algn="l">
+                      <a:pPr algn="ctr">
                         <a:defRPr sz="1630"/>
                       </a:pPr>
                       <a:r>
-                        <a:rPr sz="1630" b="0">
+                        <a:rPr sz="2000" b="0">
                           <a:solidFill>
                             <a:srgbClr val="000000"/>
                           </a:solidFill>
@@ -15737,7 +15992,7 @@
                       </a:r>
                     </a:p>
                   </a:txBody>
-                  <a:tcPr marL="54864" marR="54864" marT="27432" marB="27432">
+                  <a:tcPr marL="54864" marR="54864" marT="27432" marB="27432" anchor="ctr">
                     <a:solidFill>
                       <a:srgbClr val="FFFFFF"/>
                     </a:solidFill>
@@ -15752,7 +16007,7 @@
                         <a:defRPr sz="1630"/>
                       </a:pPr>
                       <a:r>
-                        <a:rPr sz="1630" b="0">
+                        <a:rPr sz="2000" b="0">
                           <a:solidFill>
                             <a:srgbClr val="000000"/>
                           </a:solidFill>
@@ -15764,7 +16019,7 @@
                       </a:r>
                     </a:p>
                   </a:txBody>
-                  <a:tcPr marL="54864" marR="54864" marT="27432" marB="27432">
+                  <a:tcPr marL="54864" marR="54864" marT="27432" marB="27432" anchor="ctr">
                     <a:solidFill>
                       <a:srgbClr val="FFFFFF"/>
                     </a:solidFill>
@@ -15779,7 +16034,7 @@
                         <a:defRPr sz="1630"/>
                       </a:pPr>
                       <a:r>
-                        <a:rPr sz="1630" b="0">
+                        <a:rPr sz="2000" b="0">
                           <a:solidFill>
                             <a:srgbClr val="000000"/>
                           </a:solidFill>
@@ -15791,7 +16046,7 @@
                       </a:r>
                     </a:p>
                   </a:txBody>
-                  <a:tcPr marL="54864" marR="54864" marT="27432" marB="27432">
+                  <a:tcPr marL="54864" marR="54864" marT="27432" marB="27432" anchor="ctr">
                     <a:solidFill>
                       <a:srgbClr val="FFFFFF"/>
                     </a:solidFill>
@@ -15806,7 +16061,7 @@
                         <a:defRPr sz="1630"/>
                       </a:pPr>
                       <a:r>
-                        <a:rPr sz="1630" b="0">
+                        <a:rPr sz="2000" b="0">
                           <a:solidFill>
                             <a:srgbClr val="000000"/>
                           </a:solidFill>
@@ -15818,7 +16073,7 @@
                       </a:r>
                     </a:p>
                   </a:txBody>
-                  <a:tcPr marL="54864" marR="54864" marT="27432" marB="27432">
+                  <a:tcPr marL="54864" marR="54864" marT="27432" marB="27432" anchor="ctr">
                     <a:solidFill>
                       <a:srgbClr val="FFFFFF"/>
                     </a:solidFill>
@@ -15833,7 +16088,7 @@
                         <a:defRPr sz="1630"/>
                       </a:pPr>
                       <a:r>
-                        <a:rPr sz="1630" b="0">
+                        <a:rPr sz="2000" b="0">
                           <a:solidFill>
                             <a:srgbClr val="000000"/>
                           </a:solidFill>
@@ -15845,7 +16100,7 @@
                       </a:r>
                     </a:p>
                   </a:txBody>
-                  <a:tcPr marL="54864" marR="54864" marT="27432" marB="27432">
+                  <a:tcPr marL="54864" marR="54864" marT="27432" marB="27432" anchor="ctr">
                     <a:solidFill>
                       <a:srgbClr val="FFFFFF"/>
                     </a:solidFill>
@@ -15863,11 +16118,11 @@
                     <a:bodyPr/>
                     <a:lstStyle/>
                     <a:p>
-                      <a:pPr algn="l">
+                      <a:pPr algn="ctr">
                         <a:defRPr sz="1630"/>
                       </a:pPr>
                       <a:r>
-                        <a:rPr sz="1630" b="0">
+                        <a:rPr sz="2000" b="0">
                           <a:solidFill>
                             <a:srgbClr val="000000"/>
                           </a:solidFill>
@@ -15879,7 +16134,7 @@
                       </a:r>
                     </a:p>
                   </a:txBody>
-                  <a:tcPr marL="54864" marR="54864" marT="27432" marB="27432">
+                  <a:tcPr marL="54864" marR="54864" marT="27432" marB="27432" anchor="ctr">
                     <a:solidFill>
                       <a:srgbClr val="FFFFFF"/>
                     </a:solidFill>
@@ -15894,7 +16149,7 @@
                         <a:defRPr sz="1630"/>
                       </a:pPr>
                       <a:r>
-                        <a:rPr sz="1630" b="0">
+                        <a:rPr sz="2000" b="0">
                           <a:solidFill>
                             <a:srgbClr val="000000"/>
                           </a:solidFill>
@@ -15906,7 +16161,7 @@
                       </a:r>
                     </a:p>
                   </a:txBody>
-                  <a:tcPr marL="54864" marR="54864" marT="27432" marB="27432">
+                  <a:tcPr marL="54864" marR="54864" marT="27432" marB="27432" anchor="ctr">
                     <a:solidFill>
                       <a:srgbClr val="FFFFFF"/>
                     </a:solidFill>
@@ -15921,7 +16176,7 @@
                         <a:defRPr sz="1630"/>
                       </a:pPr>
                       <a:r>
-                        <a:rPr sz="1630" b="0">
+                        <a:rPr sz="2000" b="0">
                           <a:solidFill>
                             <a:srgbClr val="000000"/>
                           </a:solidFill>
@@ -15933,7 +16188,7 @@
                       </a:r>
                     </a:p>
                   </a:txBody>
-                  <a:tcPr marL="54864" marR="54864" marT="27432" marB="27432">
+                  <a:tcPr marL="54864" marR="54864" marT="27432" marB="27432" anchor="ctr">
                     <a:solidFill>
                       <a:srgbClr val="FFFFFF"/>
                     </a:solidFill>
@@ -15948,7 +16203,7 @@
                         <a:defRPr sz="1630"/>
                       </a:pPr>
                       <a:r>
-                        <a:rPr sz="1630" b="0">
+                        <a:rPr sz="2000" b="0">
                           <a:solidFill>
                             <a:srgbClr val="000000"/>
                           </a:solidFill>
@@ -15960,7 +16215,7 @@
                       </a:r>
                     </a:p>
                   </a:txBody>
-                  <a:tcPr marL="54864" marR="54864" marT="27432" marB="27432">
+                  <a:tcPr marL="54864" marR="54864" marT="27432" marB="27432" anchor="ctr">
                     <a:solidFill>
                       <a:srgbClr val="FFFFFF"/>
                     </a:solidFill>
@@ -15975,7 +16230,7 @@
                         <a:defRPr sz="1630"/>
                       </a:pPr>
                       <a:r>
-                        <a:rPr sz="1630" b="0">
+                        <a:rPr sz="2000" b="0">
                           <a:solidFill>
                             <a:srgbClr val="000000"/>
                           </a:solidFill>
@@ -15987,7 +16242,7 @@
                       </a:r>
                     </a:p>
                   </a:txBody>
-                  <a:tcPr marL="54864" marR="54864" marT="27432" marB="27432">
+                  <a:tcPr marL="54864" marR="54864" marT="27432" marB="27432" anchor="ctr">
                     <a:solidFill>
                       <a:srgbClr val="FFFFFF"/>
                     </a:solidFill>
@@ -16011,8 +16266,8 @@
         </p:nvSpPr>
         <p:spPr>
           <a:xfrm>
-            <a:off x="502920" y="3806190"/>
-            <a:ext cx="8229600" cy="2297430"/>
+            <a:off x="411480" y="3806190"/>
+            <a:ext cx="8321040" cy="2297430"/>
           </a:xfrm>
           <a:prstGeom prst="rect">
             <a:avLst/>
@@ -16032,7 +16287,7 @@
               <a:defRPr sz="1720"/>
             </a:pPr>
             <a:r>
-              <a:rPr sz="1720" b="0">
+              <a:rPr sz="2400" b="0">
                 <a:solidFill>
                   <a:srgbClr val="000000"/>
                 </a:solidFill>
@@ -16051,7 +16306,7 @@
               <a:defRPr sz="1720"/>
             </a:pPr>
             <a:r>
-              <a:rPr sz="1720" b="0">
+              <a:rPr sz="2400" b="0">
                 <a:solidFill>
                   <a:srgbClr val="000000"/>
                 </a:solidFill>
@@ -16070,7 +16325,7 @@
               <a:defRPr sz="1720"/>
             </a:pPr>
             <a:r>
-              <a:rPr sz="1720" b="0">
+              <a:rPr sz="2400" b="0">
                 <a:solidFill>
                   <a:srgbClr val="000000"/>
                 </a:solidFill>
@@ -16224,7 +16479,7 @@
         </p:blipFill>
         <p:spPr>
           <a:xfrm>
-            <a:off x="457200" y="1645920"/>
+            <a:off x="140677" y="1663065"/>
             <a:ext cx="5486400" cy="3531870"/>
           </a:xfrm>
           <a:prstGeom prst="rect">
@@ -16240,8 +16495,8 @@
         </p:nvSpPr>
         <p:spPr>
           <a:xfrm>
-            <a:off x="6035040" y="1234440"/>
-            <a:ext cx="2834640" cy="4046220"/>
+            <a:off x="5723792" y="1544281"/>
+            <a:ext cx="3420208" cy="3769438"/>
           </a:xfrm>
           <a:prstGeom prst="rect">
             <a:avLst/>
@@ -16250,18 +16505,15 @@
         </p:spPr>
         <p:txBody>
           <a:bodyPr wrap="square" lIns="36576" tIns="18288" rIns="36576" bIns="18288">
-            <a:normAutofit/>
+            <a:noAutofit/>
           </a:bodyPr>
           <a:lstStyle/>
           <a:p>
             <a:pPr>
-              <a:spcAft>
-                <a:spcPts val="800"/>
-              </a:spcAft>
               <a:defRPr sz="2000"/>
             </a:pPr>
             <a:r>
-              <a:rPr sz="2000" b="0">
+              <a:rPr sz="2400" b="0">
                 <a:solidFill>
                   <a:srgbClr val="000000"/>
                 </a:solidFill>
@@ -16269,18 +16521,23 @@
                 <a:ea typeface="Meiryo"/>
                 <a:cs typeface="Times New Roman"/>
               </a:rPr>
-              <a:t>・ 直感把握のため、13 次元の標準化空間を PCA で 2 次元に圧縮</a:t>
-            </a:r>
+              <a:t>・ 直感把握のため、</a:t>
+            </a:r>
+            <a:endParaRPr lang="en-US" sz="2400" b="0">
+              <a:solidFill>
+                <a:srgbClr val="000000"/>
+              </a:solidFill>
+              <a:latin typeface="Times New Roman"/>
+              <a:ea typeface="Meiryo"/>
+              <a:cs typeface="Times New Roman"/>
+            </a:endParaRPr>
           </a:p>
           <a:p>
             <a:pPr>
-              <a:spcAft>
-                <a:spcPts val="800"/>
-              </a:spcAft>
               <a:defRPr sz="2000"/>
             </a:pPr>
             <a:r>
-              <a:rPr sz="2000" b="0">
+              <a:rPr sz="2400" b="0">
                 <a:solidFill>
                   <a:srgbClr val="000000"/>
                 </a:solidFill>
@@ -16288,18 +16545,23 @@
                 <a:ea typeface="Meiryo"/>
                 <a:cs typeface="Times New Roman"/>
               </a:rPr>
-              <a:t>・ AD 判定そのものは、PCA 後ではなく 13 次元の距離で行っている</a:t>
-            </a:r>
+              <a:t>13 次元の標準化空間</a:t>
+            </a:r>
+            <a:endParaRPr lang="en-US" sz="2400" b="0">
+              <a:solidFill>
+                <a:srgbClr val="000000"/>
+              </a:solidFill>
+              <a:latin typeface="Times New Roman"/>
+              <a:ea typeface="Meiryo"/>
+              <a:cs typeface="Times New Roman"/>
+            </a:endParaRPr>
           </a:p>
           <a:p>
             <a:pPr>
-              <a:spcAft>
-                <a:spcPts val="800"/>
-              </a:spcAft>
               <a:defRPr sz="2000"/>
             </a:pPr>
             <a:r>
-              <a:rPr sz="2000" b="0">
+              <a:rPr sz="2400" b="0">
                 <a:solidFill>
                   <a:srgbClr val="000000"/>
                 </a:solidFill>
@@ -16307,7 +16569,63 @@
                 <a:ea typeface="Meiryo"/>
                 <a:cs typeface="Times New Roman"/>
               </a:rPr>
-              <a:t>・ 2 次元図は直感を助けるが、距離関係が完全に保存されるわけではない</a:t>
+              <a:t>を PCA で 2 次元に圧縮</a:t>
+            </a:r>
+          </a:p>
+          <a:p>
+            <a:pPr>
+              <a:defRPr sz="2000"/>
+            </a:pPr>
+            <a:r>
+              <a:rPr sz="2400" b="0">
+                <a:solidFill>
+                  <a:srgbClr val="000000"/>
+                </a:solidFill>
+                <a:latin typeface="Times New Roman"/>
+                <a:ea typeface="Meiryo"/>
+                <a:cs typeface="Times New Roman"/>
+              </a:rPr>
+              <a:t>・ AD 判定そのものは、PCA 後ではなく13 次元の距離で行っている</a:t>
+            </a:r>
+          </a:p>
+          <a:p>
+            <a:pPr>
+              <a:defRPr sz="2000"/>
+            </a:pPr>
+            <a:r>
+              <a:rPr sz="2400" b="0">
+                <a:solidFill>
+                  <a:srgbClr val="000000"/>
+                </a:solidFill>
+                <a:latin typeface="Times New Roman"/>
+                <a:ea typeface="Meiryo"/>
+                <a:cs typeface="Times New Roman"/>
+              </a:rPr>
+              <a:t>・ 2 次元図は直感を</a:t>
+            </a:r>
+            <a:endParaRPr lang="en-US" sz="2400" b="0">
+              <a:solidFill>
+                <a:srgbClr val="000000"/>
+              </a:solidFill>
+              <a:latin typeface="Times New Roman"/>
+              <a:ea typeface="Meiryo"/>
+              <a:cs typeface="Times New Roman"/>
+            </a:endParaRPr>
+          </a:p>
+          <a:p>
+            <a:pPr>
+              <a:defRPr sz="2000"/>
+            </a:pPr>
+            <a:r>
+              <a:rPr sz="2400" b="0">
+                <a:solidFill>
+                  <a:srgbClr val="000000"/>
+                </a:solidFill>
+                <a:latin typeface="Times New Roman"/>
+                <a:ea typeface="Meiryo"/>
+                <a:cs typeface="Times New Roman"/>
+              </a:rPr>
+              <a:t>助けるが、距離関係が完全に保存されるわけではない</a:t>
             </a:r>
           </a:p>
         </p:txBody>
@@ -16466,7 +16784,7 @@
               <a:defRPr sz="2350"/>
             </a:pPr>
             <a:r>
-              <a:rPr sz="2350" b="0">
+              <a:rPr sz="2400" b="0">
                 <a:solidFill>
                   <a:srgbClr val="000000"/>
                 </a:solidFill>
@@ -16485,7 +16803,7 @@
               <a:defRPr sz="2350"/>
             </a:pPr>
             <a:r>
-              <a:rPr sz="2350" b="0">
+              <a:rPr sz="2400" b="0">
                 <a:solidFill>
                   <a:srgbClr val="000000"/>
                 </a:solidFill>
@@ -16504,7 +16822,7 @@
               <a:defRPr sz="2350"/>
             </a:pPr>
             <a:r>
-              <a:rPr sz="2350" b="0">
+              <a:rPr sz="2400" b="0">
                 <a:solidFill>
                   <a:srgbClr val="000000"/>
                 </a:solidFill>
@@ -16523,7 +16841,7 @@
               <a:defRPr sz="2350"/>
             </a:pPr>
             <a:r>
-              <a:rPr sz="2350" b="0">
+              <a:rPr sz="2400" b="0">
                 <a:solidFill>
                   <a:srgbClr val="000000"/>
                 </a:solidFill>
@@ -16545,7 +16863,7 @@
         <p:spPr>
           <a:xfrm>
             <a:off x="548640" y="3669030"/>
-            <a:ext cx="8046720" cy="2023110"/>
+            <a:ext cx="8046720" cy="2237994"/>
           </a:xfrm>
           <a:prstGeom prst="rect">
             <a:avLst/>
@@ -16594,8 +16912,8 @@
         </p:nvSpPr>
         <p:spPr>
           <a:xfrm>
-            <a:off x="621792" y="3758184"/>
-            <a:ext cx="7863840" cy="1851660"/>
+            <a:off x="621792" y="3736731"/>
+            <a:ext cx="7863840" cy="2039816"/>
           </a:xfrm>
           <a:prstGeom prst="rect">
             <a:avLst/>
@@ -16604,7 +16922,7 @@
         </p:spPr>
         <p:txBody>
           <a:bodyPr wrap="square" lIns="36576" tIns="18288" rIns="36576" bIns="18288">
-            <a:normAutofit lnSpcReduction="10000"/>
+            <a:noAutofit/>
           </a:bodyPr>
           <a:lstStyle/>
           <a:p>
@@ -16615,7 +16933,7 @@
               <a:defRPr sz="2200"/>
             </a:pPr>
             <a:r>
-              <a:rPr sz="2200" b="1">
+              <a:rPr sz="2400" b="1">
                 <a:solidFill>
                   <a:srgbClr val="000000"/>
                 </a:solidFill>
@@ -16634,7 +16952,7 @@
               <a:defRPr sz="2200"/>
             </a:pPr>
             <a:r>
-              <a:rPr sz="2200" b="0">
+              <a:rPr sz="2400" b="0">
                 <a:solidFill>
                   <a:srgbClr val="000000"/>
                 </a:solidFill>
@@ -16653,7 +16971,7 @@
               <a:defRPr sz="2200"/>
             </a:pPr>
             <a:r>
-              <a:rPr sz="2200" b="0">
+              <a:rPr sz="2400" b="0">
                 <a:solidFill>
                   <a:srgbClr val="000000"/>
                 </a:solidFill>
@@ -16799,8 +17117,8 @@
         </p:nvSpPr>
         <p:spPr>
           <a:xfrm>
-            <a:off x="548640" y="1200150"/>
-            <a:ext cx="7955280" cy="3429000"/>
+            <a:off x="411480" y="1218438"/>
+            <a:ext cx="8321040" cy="2420874"/>
           </a:xfrm>
           <a:prstGeom prst="rect">
             <a:avLst/>
@@ -16820,7 +17138,7 @@
               <a:defRPr sz="2300"/>
             </a:pPr>
             <a:r>
-              <a:rPr sz="2300" b="0">
+              <a:rPr sz="2400" b="0">
                 <a:solidFill>
                   <a:srgbClr val="000000"/>
                 </a:solidFill>
@@ -16839,7 +17157,7 @@
               <a:defRPr sz="2300"/>
             </a:pPr>
             <a:r>
-              <a:rPr sz="2300" b="0">
+              <a:rPr sz="2400" b="0">
                 <a:solidFill>
                   <a:srgbClr val="000000"/>
                 </a:solidFill>
@@ -16858,7 +17176,7 @@
               <a:defRPr sz="2300"/>
             </a:pPr>
             <a:r>
-              <a:rPr sz="2300" b="0">
+              <a:rPr sz="2400" b="0">
                 <a:solidFill>
                   <a:srgbClr val="000000"/>
                 </a:solidFill>
@@ -16877,7 +17195,7 @@
               <a:defRPr sz="2300"/>
             </a:pPr>
             <a:r>
-              <a:rPr sz="2300" b="0">
+              <a:rPr sz="2400" b="0">
                 <a:solidFill>
                   <a:srgbClr val="000000"/>
                 </a:solidFill>
@@ -16896,7 +17214,7 @@
               <a:defRPr sz="2300"/>
             </a:pPr>
             <a:r>
-              <a:rPr sz="2300" b="0">
+              <a:rPr sz="2400" b="0">
                 <a:solidFill>
                   <a:srgbClr val="000000"/>
                 </a:solidFill>
@@ -16917,8 +17235,8 @@
         </p:nvSpPr>
         <p:spPr>
           <a:xfrm>
-            <a:off x="594360" y="5177790"/>
-            <a:ext cx="7955280" cy="788670"/>
+            <a:off x="411480" y="5118354"/>
+            <a:ext cx="8521505" cy="788670"/>
           </a:xfrm>
           <a:prstGeom prst="rect">
             <a:avLst/>
@@ -16938,7 +17256,7 @@
               <a:defRPr sz="2150"/>
             </a:pPr>
             <a:r>
-              <a:rPr sz="2150" b="0">
+              <a:rPr sz="2400" b="0">
                 <a:solidFill>
                   <a:srgbClr val="000000"/>
                 </a:solidFill>
@@ -17946,8 +18264,8 @@
         </p:nvSpPr>
         <p:spPr>
           <a:xfrm>
-            <a:off x="585216" y="1207008"/>
-            <a:ext cx="7955280" cy="2091690"/>
+            <a:off x="594360" y="1209294"/>
+            <a:ext cx="7955280" cy="2493146"/>
           </a:xfrm>
           <a:prstGeom prst="rect">
             <a:avLst/>
@@ -17956,7 +18274,7 @@
         </p:spPr>
         <p:txBody>
           <a:bodyPr wrap="square" lIns="36576" tIns="18288" rIns="36576" bIns="18288">
-            <a:normAutofit fontScale="92500" lnSpcReduction="10000"/>
+            <a:noAutofit/>
           </a:bodyPr>
           <a:lstStyle/>
           <a:p>
@@ -17967,7 +18285,7 @@
               <a:defRPr sz="2350"/>
             </a:pPr>
             <a:r>
-              <a:rPr sz="2350" b="0">
+              <a:rPr sz="2200" b="0">
                 <a:solidFill>
                   <a:srgbClr val="000000"/>
                 </a:solidFill>
@@ -17986,7 +18304,7 @@
               <a:defRPr sz="2350"/>
             </a:pPr>
             <a:r>
-              <a:rPr sz="2350" b="0">
+              <a:rPr sz="2200" b="0">
                 <a:solidFill>
                   <a:srgbClr val="000000"/>
                 </a:solidFill>
@@ -17994,8 +18312,16 @@
                 <a:ea typeface="Meiryo"/>
                 <a:cs typeface="Times New Roman"/>
               </a:rPr>
-              <a:t>・ 平均的な性能は分かるが、個々の予測が内挿か外挿かは分からない</a:t>
-            </a:r>
+              <a:t>・ 平均的な性能は分かるが、個々の予測が内挿か外挿かは</a:t>
+            </a:r>
+            <a:endParaRPr lang="en-US" sz="2200" b="0">
+              <a:solidFill>
+                <a:srgbClr val="000000"/>
+              </a:solidFill>
+              <a:latin typeface="Times New Roman"/>
+              <a:ea typeface="Meiryo"/>
+              <a:cs typeface="Times New Roman"/>
+            </a:endParaRPr>
           </a:p>
           <a:p>
             <a:pPr>
@@ -18005,7 +18331,7 @@
               <a:defRPr sz="2350"/>
             </a:pPr>
             <a:r>
-              <a:rPr sz="2350" b="0">
+              <a:rPr sz="2200" b="0">
                 <a:solidFill>
                   <a:srgbClr val="000000"/>
                 </a:solidFill>
@@ -18013,7 +18339,53 @@
                 <a:ea typeface="Meiryo"/>
                 <a:cs typeface="Times New Roman"/>
               </a:rPr>
-              <a:t>・ 外挿領域では誤差が大きくなりやすく、予測の信頼性が下がる</a:t>
+              <a:t>分からない</a:t>
+            </a:r>
+          </a:p>
+          <a:p>
+            <a:pPr>
+              <a:spcAft>
+                <a:spcPts val="800"/>
+              </a:spcAft>
+              <a:defRPr sz="2350"/>
+            </a:pPr>
+            <a:r>
+              <a:rPr sz="2200" b="0">
+                <a:solidFill>
+                  <a:srgbClr val="000000"/>
+                </a:solidFill>
+                <a:latin typeface="Times New Roman"/>
+                <a:ea typeface="Meiryo"/>
+                <a:cs typeface="Times New Roman"/>
+              </a:rPr>
+              <a:t>・ 外挿領域では誤差が大きくなりやすく、予測の信頼性が</a:t>
+            </a:r>
+            <a:endParaRPr lang="en-US" sz="2200" b="0">
+              <a:solidFill>
+                <a:srgbClr val="000000"/>
+              </a:solidFill>
+              <a:latin typeface="Times New Roman"/>
+              <a:ea typeface="Meiryo"/>
+              <a:cs typeface="Times New Roman"/>
+            </a:endParaRPr>
+          </a:p>
+          <a:p>
+            <a:pPr>
+              <a:spcAft>
+                <a:spcPts val="800"/>
+              </a:spcAft>
+              <a:defRPr sz="2350"/>
+            </a:pPr>
+            <a:r>
+              <a:rPr sz="2200" b="0">
+                <a:solidFill>
+                  <a:srgbClr val="000000"/>
+                </a:solidFill>
+                <a:latin typeface="Times New Roman"/>
+                <a:ea typeface="Meiryo"/>
+                <a:cs typeface="Times New Roman"/>
+              </a:rPr>
+              <a:t>下がる</a:t>
             </a:r>
           </a:p>
         </p:txBody>
@@ -18026,8 +18398,8 @@
         </p:nvSpPr>
         <p:spPr>
           <a:xfrm>
-            <a:off x="530352" y="3566160"/>
-            <a:ext cx="8001000" cy="1714500"/>
+            <a:off x="411480" y="4067497"/>
+            <a:ext cx="8321040" cy="1714500"/>
           </a:xfrm>
           <a:prstGeom prst="rect">
             <a:avLst/>
@@ -18076,8 +18448,8 @@
         </p:nvSpPr>
         <p:spPr>
           <a:xfrm>
-            <a:off x="585216" y="3648456"/>
-            <a:ext cx="7882128" cy="1543050"/>
+            <a:off x="411480" y="4149793"/>
+            <a:ext cx="8321040" cy="1543050"/>
           </a:xfrm>
           <a:prstGeom prst="rect">
             <a:avLst/>
@@ -18156,7 +18528,7 @@
         </p:nvSpPr>
         <p:spPr>
           <a:xfrm>
-            <a:off x="594360" y="5520690"/>
+            <a:off x="594360" y="6147054"/>
             <a:ext cx="7955280" cy="480060"/>
           </a:xfrm>
           <a:prstGeom prst="rect">
